--- a/assets/ppt/opt/opt1-regalloc-graph.pptx
+++ b/assets/ppt/opt/opt1-regalloc-graph.pptx
@@ -5,10 +5,10 @@
     <p:sldMasterId id="2147483660" r:id="rId1"/>
   </p:sldMasterIdLst>
   <p:notesMasterIdLst>
-    <p:notesMasterId r:id="rId34"/>
+    <p:notesMasterId r:id="rId35"/>
   </p:notesMasterIdLst>
   <p:handoutMasterIdLst>
-    <p:handoutMasterId r:id="rId35"/>
+    <p:handoutMasterId r:id="rId36"/>
   </p:handoutMasterIdLst>
   <p:sldIdLst>
     <p:sldId id="406" r:id="rId2"/>
@@ -43,6 +43,7 @@
     <p:sldId id="340" r:id="rId31"/>
     <p:sldId id="341" r:id="rId32"/>
     <p:sldId id="358" r:id="rId33"/>
+    <p:sldId id="407" r:id="rId34"/>
   </p:sldIdLst>
   <p:sldSz cx="9144000" cy="5143500" type="screen16x9"/>
   <p:notesSz cx="6858000" cy="9144000"/>
@@ -276,7 +277,7 @@
               <a:rPr lang="en-US" smtClean="0">
                 <a:latin typeface="Calibri"/>
               </a:rPr>
-              <a:t>11/14/20</a:t>
+              <a:t>7/21/25</a:t>
             </a:fld>
             <a:endParaRPr lang="en-US" dirty="0">
               <a:latin typeface="Calibri"/>
@@ -1237,7 +1238,7 @@
           <a:p>
             <a:fld id="{37508BEE-B66E-5E46-B50F-23B30D56323F}" type="datetime1">
               <a:rPr lang="en-CA" smtClean="0"/>
-              <a:t>2020-11-14</a:t>
+              <a:t>2025-07-21</a:t>
             </a:fld>
             <a:endParaRPr lang="en-US"/>
           </a:p>
@@ -1435,7 +1436,7 @@
           <a:p>
             <a:fld id="{94ED5F46-E862-7041-B839-1084A839C514}" type="datetime1">
               <a:rPr lang="en-CA" smtClean="0"/>
-              <a:t>2020-11-14</a:t>
+              <a:t>2025-07-21</a:t>
             </a:fld>
             <a:endParaRPr lang="en-US"/>
           </a:p>
@@ -1643,7 +1644,7 @@
           <a:p>
             <a:fld id="{A0755934-2EEA-454B-B47B-39481B16D93C}" type="datetime1">
               <a:rPr lang="en-CA" smtClean="0"/>
-              <a:t>2020-11-14</a:t>
+              <a:t>2025-07-21</a:t>
             </a:fld>
             <a:endParaRPr lang="en-US"/>
           </a:p>
@@ -2706,7 +2707,7 @@
           <a:p>
             <a:fld id="{33CDF6D5-475A-F046-87CA-412EB71D7141}" type="datetime1">
               <a:rPr lang="en-CA" smtClean="0"/>
-              <a:t>2020-11-14</a:t>
+              <a:t>2025-07-21</a:t>
             </a:fld>
             <a:endParaRPr/>
           </a:p>
@@ -3122,7 +3123,7 @@
           <a:p>
             <a:fld id="{BD806BE7-D4FF-0747-A46D-9D28D6793F9A}" type="datetime1">
               <a:rPr lang="en-CA" smtClean="0"/>
-              <a:t>2020-11-14</a:t>
+              <a:t>2025-07-21</a:t>
             </a:fld>
             <a:endParaRPr lang="en-US"/>
           </a:p>
@@ -3397,7 +3398,7 @@
           <a:p>
             <a:fld id="{FC112D8A-ADE8-E648-9A51-673455F77FA4}" type="datetime1">
               <a:rPr lang="en-CA" smtClean="0"/>
-              <a:t>2020-11-14</a:t>
+              <a:t>2025-07-21</a:t>
             </a:fld>
             <a:endParaRPr lang="en-US"/>
           </a:p>
@@ -3662,7 +3663,7 @@
           <a:p>
             <a:fld id="{A1C4D21D-FE66-404B-9D48-8813A41FDE83}" type="datetime1">
               <a:rPr lang="en-CA" smtClean="0"/>
-              <a:t>2020-11-14</a:t>
+              <a:t>2025-07-21</a:t>
             </a:fld>
             <a:endParaRPr lang="en-US"/>
           </a:p>
@@ -4074,7 +4075,7 @@
           <a:p>
             <a:fld id="{BC43913A-9187-9E4F-99AD-E5F9D3D715A1}" type="datetime1">
               <a:rPr lang="en-CA" smtClean="0"/>
-              <a:t>2020-11-14</a:t>
+              <a:t>2025-07-21</a:t>
             </a:fld>
             <a:endParaRPr lang="en-US"/>
           </a:p>
@@ -4215,7 +4216,7 @@
           <a:p>
             <a:fld id="{D640FCF0-750B-2849-A907-F64332DB8FEE}" type="datetime1">
               <a:rPr lang="en-CA" smtClean="0"/>
-              <a:t>2020-11-14</a:t>
+              <a:t>2025-07-21</a:t>
             </a:fld>
             <a:endParaRPr lang="en-US"/>
           </a:p>
@@ -4328,7 +4329,7 @@
           <a:p>
             <a:fld id="{C84DF663-3970-9B45-8274-AA8FABDA274B}" type="datetime1">
               <a:rPr lang="en-CA" smtClean="0"/>
-              <a:t>2020-11-14</a:t>
+              <a:t>2025-07-21</a:t>
             </a:fld>
             <a:endParaRPr lang="en-US"/>
           </a:p>
@@ -4639,7 +4640,7 @@
           <a:p>
             <a:fld id="{2EE809A3-0E53-524E-A233-B12C5DA91D99}" type="datetime1">
               <a:rPr lang="en-CA" smtClean="0"/>
-              <a:t>2020-11-14</a:t>
+              <a:t>2025-07-21</a:t>
             </a:fld>
             <a:endParaRPr lang="en-US"/>
           </a:p>
@@ -4927,7 +4928,7 @@
           <a:p>
             <a:fld id="{CBAFDF68-DD51-514E-B179-E22080947065}" type="datetime1">
               <a:rPr lang="en-CA" smtClean="0"/>
-              <a:t>2020-11-14</a:t>
+              <a:t>2025-07-21</a:t>
             </a:fld>
             <a:endParaRPr lang="en-US"/>
           </a:p>
@@ -5169,7 +5170,7 @@
           <a:p>
             <a:fld id="{CFB5B512-1C0B-5F4A-B1D8-07EED328189A}" type="datetime1">
               <a:rPr lang="en-CA" smtClean="0"/>
-              <a:t>2020-11-14</a:t>
+              <a:t>2025-07-21</a:t>
             </a:fld>
             <a:endParaRPr lang="en-US" dirty="0"/>
           </a:p>
@@ -19808,6 +19809,2031 @@
   <p:clrMapOvr>
     <a:masterClrMapping/>
   </p:clrMapOvr>
+</p:sld>
+</file>
+
+<file path=ppt/slides/slide33.xml><?xml version="1.0" encoding="utf-8"?>
+<p:sld xmlns:a="http://schemas.openxmlformats.org/drawingml/2006/main" xmlns:r="http://schemas.openxmlformats.org/officeDocument/2006/relationships" xmlns:p="http://schemas.openxmlformats.org/presentationml/2006/main">
+  <p:cSld>
+    <p:spTree>
+      <p:nvGrpSpPr>
+        <p:cNvPr id="1" name="">
+          <a:extLst>
+            <a:ext uri="{FF2B5EF4-FFF2-40B4-BE49-F238E27FC236}">
+              <a16:creationId xmlns:a16="http://schemas.microsoft.com/office/drawing/2014/main" id="{5AE97FF6-EFD5-17B7-B071-5DAFE20DF697}"/>
+            </a:ext>
+          </a:extLst>
+        </p:cNvPr>
+        <p:cNvGrpSpPr/>
+        <p:nvPr/>
+      </p:nvGrpSpPr>
+      <p:grpSpPr>
+        <a:xfrm>
+          <a:off x="0" y="0"/>
+          <a:ext cx="0" cy="0"/>
+          <a:chOff x="0" y="0"/>
+          <a:chExt cx="0" cy="0"/>
+        </a:xfrm>
+      </p:grpSpPr>
+      <p:sp>
+        <p:nvSpPr>
+          <p:cNvPr id="2" name="Title 1">
+            <a:extLst>
+              <a:ext uri="{FF2B5EF4-FFF2-40B4-BE49-F238E27FC236}">
+                <a16:creationId xmlns:a16="http://schemas.microsoft.com/office/drawing/2014/main" id="{A9F1DC39-96D0-6352-F2F3-5F71663668BA}"/>
+              </a:ext>
+            </a:extLst>
+          </p:cNvPr>
+          <p:cNvSpPr>
+            <a:spLocks noGrp="1"/>
+          </p:cNvSpPr>
+          <p:nvPr>
+            <p:ph type="title"/>
+          </p:nvPr>
+        </p:nvSpPr>
+        <p:spPr/>
+        <p:txBody>
+          <a:bodyPr/>
+          <a:lstStyle/>
+          <a:p>
+            <a:r>
+              <a:rPr lang="en-CA" dirty="0"/>
+              <a:t>SSA</a:t>
+            </a:r>
+          </a:p>
+        </p:txBody>
+      </p:sp>
+      <p:sp>
+        <p:nvSpPr>
+          <p:cNvPr id="5" name="Slide Number Placeholder 4">
+            <a:extLst>
+              <a:ext uri="{FF2B5EF4-FFF2-40B4-BE49-F238E27FC236}">
+                <a16:creationId xmlns:a16="http://schemas.microsoft.com/office/drawing/2014/main" id="{B976AE6D-6ABF-F47D-12CF-504EFE736202}"/>
+              </a:ext>
+            </a:extLst>
+          </p:cNvPr>
+          <p:cNvSpPr>
+            <a:spLocks noGrp="1"/>
+          </p:cNvSpPr>
+          <p:nvPr>
+            <p:ph type="sldNum" sz="quarter" idx="12"/>
+          </p:nvPr>
+        </p:nvSpPr>
+        <p:spPr/>
+        <p:txBody>
+          <a:bodyPr/>
+          <a:lstStyle/>
+          <a:p>
+            <a:fld id="{30D63D9E-7E5D-D141-B365-4BE0ED56F47E}" type="slidenum">
+              <a:rPr lang="en-US" smtClean="0"/>
+              <a:pPr/>
+              <a:t>33</a:t>
+            </a:fld>
+            <a:endParaRPr lang="en-US"/>
+          </a:p>
+        </p:txBody>
+      </p:sp>
+      <p:sp>
+        <p:nvSpPr>
+          <p:cNvPr id="6" name="Rectangle 5">
+            <a:extLst>
+              <a:ext uri="{FF2B5EF4-FFF2-40B4-BE49-F238E27FC236}">
+                <a16:creationId xmlns:a16="http://schemas.microsoft.com/office/drawing/2014/main" id="{A139A440-741F-0DFF-00A8-5CDB30F47515}"/>
+              </a:ext>
+            </a:extLst>
+          </p:cNvPr>
+          <p:cNvSpPr/>
+          <p:nvPr/>
+        </p:nvSpPr>
+        <p:spPr bwMode="auto">
+          <a:xfrm>
+            <a:off x="2843808" y="1679596"/>
+            <a:ext cx="1728191" cy="1254644"/>
+          </a:xfrm>
+          <a:prstGeom prst="rect">
+            <a:avLst/>
+          </a:prstGeom>
+          <a:solidFill>
+            <a:schemeClr val="accent5">
+              <a:lumMod val="40000"/>
+              <a:lumOff val="60000"/>
+            </a:schemeClr>
+          </a:solidFill>
+          <a:ln w="9525" cap="flat" cmpd="sng" algn="ctr">
+            <a:solidFill>
+              <a:schemeClr val="tx1"/>
+            </a:solidFill>
+            <a:prstDash val="solid"/>
+            <a:round/>
+            <a:headEnd type="none" w="med" len="med"/>
+            <a:tailEnd type="none" w="med" len="med"/>
+          </a:ln>
+          <a:effectLst/>
+        </p:spPr>
+        <p:txBody>
+          <a:bodyPr vert="horz" wrap="square" lIns="68580" tIns="34290" rIns="68580" bIns="34290" numCol="1" rtlCol="0" anchor="t" anchorCtr="0" compatLnSpc="1">
+            <a:prstTxWarp prst="textNoShape">
+              <a:avLst/>
+            </a:prstTxWarp>
+          </a:bodyPr>
+          <a:lstStyle/>
+          <a:p>
+            <a:pPr algn="ctr"/>
+            <a:r>
+              <a:rPr lang="en-CA" sz="1800" dirty="0">
+                <a:latin typeface="Calibri"/>
+              </a:rPr>
+              <a:t>b4 = </a:t>
+            </a:r>
+            <a:r>
+              <a:rPr lang="en-US" sz="1800" dirty="0">
+                <a:latin typeface="Calibri" panose="020F0502020204030204" pitchFamily="34" charset="0"/>
+                <a:sym typeface="Symbol" charset="2"/>
+              </a:rPr>
+              <a:t>(b1,b3)</a:t>
+            </a:r>
+            <a:endParaRPr lang="en-CA" sz="1800" dirty="0">
+              <a:latin typeface="Calibri"/>
+            </a:endParaRPr>
+          </a:p>
+          <a:p>
+            <a:pPr algn="ctr"/>
+            <a:r>
+              <a:rPr lang="en-CA" sz="1800" dirty="0">
+                <a:latin typeface="Calibri"/>
+              </a:rPr>
+              <a:t>a1 = b4+c1</a:t>
+            </a:r>
+          </a:p>
+          <a:p>
+            <a:pPr algn="ctr"/>
+            <a:r>
+              <a:rPr lang="en-CA" sz="1800" dirty="0">
+                <a:latin typeface="Calibri"/>
+              </a:rPr>
+              <a:t>d1 = -a1</a:t>
+            </a:r>
+          </a:p>
+          <a:p>
+            <a:pPr algn="ctr"/>
+            <a:r>
+              <a:rPr lang="en-CA" sz="1800" dirty="0">
+                <a:latin typeface="Calibri"/>
+              </a:rPr>
+              <a:t>e1 = d1+f1</a:t>
+            </a:r>
+          </a:p>
+        </p:txBody>
+      </p:sp>
+      <p:sp>
+        <p:nvSpPr>
+          <p:cNvPr id="7" name="Rectangle 6">
+            <a:extLst>
+              <a:ext uri="{FF2B5EF4-FFF2-40B4-BE49-F238E27FC236}">
+                <a16:creationId xmlns:a16="http://schemas.microsoft.com/office/drawing/2014/main" id="{0A2006E7-0D4D-A52F-6EED-4ECE994A1AD2}"/>
+              </a:ext>
+            </a:extLst>
+          </p:cNvPr>
+          <p:cNvSpPr/>
+          <p:nvPr/>
+        </p:nvSpPr>
+        <p:spPr bwMode="auto">
+          <a:xfrm>
+            <a:off x="1932107" y="3360942"/>
+            <a:ext cx="1242138" cy="366509"/>
+          </a:xfrm>
+          <a:prstGeom prst="rect">
+            <a:avLst/>
+          </a:prstGeom>
+          <a:solidFill>
+            <a:schemeClr val="accent5">
+              <a:lumMod val="40000"/>
+              <a:lumOff val="60000"/>
+            </a:schemeClr>
+          </a:solidFill>
+          <a:ln w="9525" cap="flat" cmpd="sng" algn="ctr">
+            <a:solidFill>
+              <a:schemeClr val="tx1"/>
+            </a:solidFill>
+            <a:prstDash val="solid"/>
+            <a:round/>
+            <a:headEnd type="none" w="med" len="med"/>
+            <a:tailEnd type="none" w="med" len="med"/>
+          </a:ln>
+          <a:effectLst/>
+        </p:spPr>
+        <p:txBody>
+          <a:bodyPr vert="horz" wrap="square" lIns="68580" tIns="34290" rIns="68580" bIns="34290" numCol="1" rtlCol="0" anchor="t" anchorCtr="0" compatLnSpc="1">
+            <a:prstTxWarp prst="textNoShape">
+              <a:avLst/>
+            </a:prstTxWarp>
+          </a:bodyPr>
+          <a:lstStyle/>
+          <a:p>
+            <a:pPr algn="ctr" defTabSz="685800"/>
+            <a:r>
+              <a:rPr lang="en-CA" sz="1800" dirty="0">
+                <a:latin typeface="Calibri"/>
+              </a:rPr>
+              <a:t>f1 = 2*e1</a:t>
+            </a:r>
+          </a:p>
+        </p:txBody>
+      </p:sp>
+      <p:sp>
+        <p:nvSpPr>
+          <p:cNvPr id="8" name="Rectangle 7">
+            <a:extLst>
+              <a:ext uri="{FF2B5EF4-FFF2-40B4-BE49-F238E27FC236}">
+                <a16:creationId xmlns:a16="http://schemas.microsoft.com/office/drawing/2014/main" id="{F107366E-05BF-5790-8CC5-767E37D9F9DC}"/>
+              </a:ext>
+            </a:extLst>
+          </p:cNvPr>
+          <p:cNvSpPr/>
+          <p:nvPr/>
+        </p:nvSpPr>
+        <p:spPr bwMode="auto">
+          <a:xfrm>
+            <a:off x="4362377" y="3201436"/>
+            <a:ext cx="1242138" cy="608841"/>
+          </a:xfrm>
+          <a:prstGeom prst="rect">
+            <a:avLst/>
+          </a:prstGeom>
+          <a:solidFill>
+            <a:schemeClr val="accent5">
+              <a:lumMod val="40000"/>
+              <a:lumOff val="60000"/>
+            </a:schemeClr>
+          </a:solidFill>
+          <a:ln w="9525" cap="flat" cmpd="sng" algn="ctr">
+            <a:solidFill>
+              <a:schemeClr val="tx1"/>
+            </a:solidFill>
+            <a:prstDash val="solid"/>
+            <a:round/>
+            <a:headEnd type="none" w="med" len="med"/>
+            <a:tailEnd type="none" w="med" len="med"/>
+          </a:ln>
+          <a:effectLst/>
+        </p:spPr>
+        <p:txBody>
+          <a:bodyPr vert="horz" wrap="square" lIns="68580" tIns="34290" rIns="68580" bIns="34290" numCol="1" rtlCol="0" anchor="t" anchorCtr="0" compatLnSpc="1">
+            <a:prstTxWarp prst="textNoShape">
+              <a:avLst/>
+            </a:prstTxWarp>
+          </a:bodyPr>
+          <a:lstStyle/>
+          <a:p>
+            <a:pPr algn="ctr" defTabSz="685800"/>
+            <a:r>
+              <a:rPr lang="en-CA" sz="1800" dirty="0">
+                <a:latin typeface="Calibri"/>
+              </a:rPr>
+              <a:t>b2 = d1+e1</a:t>
+            </a:r>
+          </a:p>
+          <a:p>
+            <a:pPr algn="ctr" defTabSz="685800"/>
+            <a:r>
+              <a:rPr lang="en-CA" sz="1800" dirty="0">
+                <a:latin typeface="Calibri"/>
+              </a:rPr>
+              <a:t>e2 = e1-1</a:t>
+            </a:r>
+          </a:p>
+        </p:txBody>
+      </p:sp>
+      <p:sp>
+        <p:nvSpPr>
+          <p:cNvPr id="9" name="Rectangle 8">
+            <a:extLst>
+              <a:ext uri="{FF2B5EF4-FFF2-40B4-BE49-F238E27FC236}">
+                <a16:creationId xmlns:a16="http://schemas.microsoft.com/office/drawing/2014/main" id="{0FD4DCB4-8027-3452-9ADA-C84F7C38A6FD}"/>
+              </a:ext>
+            </a:extLst>
+          </p:cNvPr>
+          <p:cNvSpPr/>
+          <p:nvPr/>
+        </p:nvSpPr>
+        <p:spPr bwMode="auto">
+          <a:xfrm>
+            <a:off x="3142096" y="4036915"/>
+            <a:ext cx="1645927" cy="426702"/>
+          </a:xfrm>
+          <a:prstGeom prst="rect">
+            <a:avLst/>
+          </a:prstGeom>
+          <a:solidFill>
+            <a:schemeClr val="accent5">
+              <a:lumMod val="40000"/>
+              <a:lumOff val="60000"/>
+            </a:schemeClr>
+          </a:solidFill>
+          <a:ln w="9525" cap="flat" cmpd="sng" algn="ctr">
+            <a:solidFill>
+              <a:schemeClr val="tx1"/>
+            </a:solidFill>
+            <a:prstDash val="solid"/>
+            <a:round/>
+            <a:headEnd type="none" w="med" len="med"/>
+            <a:tailEnd type="none" w="med" len="med"/>
+          </a:ln>
+          <a:effectLst/>
+        </p:spPr>
+        <p:txBody>
+          <a:bodyPr vert="horz" wrap="square" lIns="68580" tIns="34290" rIns="68580" bIns="34290" numCol="1" rtlCol="0" anchor="t" anchorCtr="0" compatLnSpc="1">
+            <a:prstTxWarp prst="textNoShape">
+              <a:avLst/>
+            </a:prstTxWarp>
+          </a:bodyPr>
+          <a:lstStyle/>
+          <a:p>
+            <a:pPr algn="ctr" defTabSz="685800"/>
+            <a:r>
+              <a:rPr lang="en-US" sz="1800" dirty="0">
+                <a:latin typeface="Calibri" panose="020F0502020204030204" pitchFamily="34" charset="0"/>
+                <a:sym typeface="Symbol" charset="2"/>
+              </a:rPr>
+              <a:t>b3 = </a:t>
+            </a:r>
+            <a:r>
+              <a:rPr lang="en-CA" sz="1800" dirty="0">
+                <a:latin typeface="Calibri"/>
+              </a:rPr>
+              <a:t>f1+c1</a:t>
+            </a:r>
+          </a:p>
+        </p:txBody>
+      </p:sp>
+      <p:cxnSp>
+        <p:nvCxnSpPr>
+          <p:cNvPr id="11" name="Straight Arrow Connector 10">
+            <a:extLst>
+              <a:ext uri="{FF2B5EF4-FFF2-40B4-BE49-F238E27FC236}">
+                <a16:creationId xmlns:a16="http://schemas.microsoft.com/office/drawing/2014/main" id="{F576441D-F456-81F6-28FB-0ED964EF65A6}"/>
+              </a:ext>
+            </a:extLst>
+          </p:cNvPr>
+          <p:cNvCxnSpPr>
+            <a:cxnSpLocks/>
+            <a:stCxn id="6" idx="2"/>
+            <a:endCxn id="7" idx="0"/>
+          </p:cNvCxnSpPr>
+          <p:nvPr/>
+        </p:nvCxnSpPr>
+        <p:spPr bwMode="auto">
+          <a:xfrm flipH="1">
+            <a:off x="2553176" y="2934240"/>
+            <a:ext cx="1154728" cy="426702"/>
+          </a:xfrm>
+          <a:prstGeom prst="straightConnector1">
+            <a:avLst/>
+          </a:prstGeom>
+          <a:solidFill>
+            <a:schemeClr val="accent1"/>
+          </a:solidFill>
+          <a:ln w="28575" cap="flat" cmpd="sng" algn="ctr">
+            <a:solidFill>
+              <a:schemeClr val="tx1"/>
+            </a:solidFill>
+            <a:prstDash val="solid"/>
+            <a:round/>
+            <a:headEnd type="none" w="med" len="med"/>
+            <a:tailEnd type="arrow"/>
+          </a:ln>
+          <a:effectLst/>
+        </p:spPr>
+      </p:cxnSp>
+      <p:cxnSp>
+        <p:nvCxnSpPr>
+          <p:cNvPr id="13" name="Straight Arrow Connector 12">
+            <a:extLst>
+              <a:ext uri="{FF2B5EF4-FFF2-40B4-BE49-F238E27FC236}">
+                <a16:creationId xmlns:a16="http://schemas.microsoft.com/office/drawing/2014/main" id="{C977A9F8-46EF-EB6E-E5B6-1EA2B796E9E8}"/>
+              </a:ext>
+            </a:extLst>
+          </p:cNvPr>
+          <p:cNvCxnSpPr>
+            <a:cxnSpLocks/>
+            <a:stCxn id="6" idx="2"/>
+            <a:endCxn id="8" idx="0"/>
+          </p:cNvCxnSpPr>
+          <p:nvPr/>
+        </p:nvCxnSpPr>
+        <p:spPr bwMode="auto">
+          <a:xfrm>
+            <a:off x="3707904" y="2934240"/>
+            <a:ext cx="1275542" cy="267196"/>
+          </a:xfrm>
+          <a:prstGeom prst="straightConnector1">
+            <a:avLst/>
+          </a:prstGeom>
+          <a:solidFill>
+            <a:schemeClr val="accent1"/>
+          </a:solidFill>
+          <a:ln w="28575" cap="flat" cmpd="sng" algn="ctr">
+            <a:solidFill>
+              <a:schemeClr val="tx1"/>
+            </a:solidFill>
+            <a:prstDash val="solid"/>
+            <a:round/>
+            <a:headEnd type="none" w="med" len="med"/>
+            <a:tailEnd type="arrow"/>
+          </a:ln>
+          <a:effectLst/>
+        </p:spPr>
+      </p:cxnSp>
+      <p:cxnSp>
+        <p:nvCxnSpPr>
+          <p:cNvPr id="16" name="Straight Arrow Connector 15">
+            <a:extLst>
+              <a:ext uri="{FF2B5EF4-FFF2-40B4-BE49-F238E27FC236}">
+                <a16:creationId xmlns:a16="http://schemas.microsoft.com/office/drawing/2014/main" id="{4D756228-4346-9319-9F85-F085D64C4FC4}"/>
+              </a:ext>
+            </a:extLst>
+          </p:cNvPr>
+          <p:cNvCxnSpPr>
+            <a:cxnSpLocks/>
+            <a:stCxn id="7" idx="2"/>
+            <a:endCxn id="9" idx="0"/>
+          </p:cNvCxnSpPr>
+          <p:nvPr/>
+        </p:nvCxnSpPr>
+        <p:spPr bwMode="auto">
+          <a:xfrm>
+            <a:off x="2553176" y="3727451"/>
+            <a:ext cx="1411884" cy="309464"/>
+          </a:xfrm>
+          <a:prstGeom prst="straightConnector1">
+            <a:avLst/>
+          </a:prstGeom>
+          <a:solidFill>
+            <a:schemeClr val="accent1"/>
+          </a:solidFill>
+          <a:ln w="28575" cap="flat" cmpd="sng" algn="ctr">
+            <a:solidFill>
+              <a:schemeClr val="tx1"/>
+            </a:solidFill>
+            <a:prstDash val="solid"/>
+            <a:round/>
+            <a:headEnd type="none" w="med" len="med"/>
+            <a:tailEnd type="arrow"/>
+          </a:ln>
+          <a:effectLst/>
+        </p:spPr>
+      </p:cxnSp>
+      <p:cxnSp>
+        <p:nvCxnSpPr>
+          <p:cNvPr id="19" name="Straight Arrow Connector 18">
+            <a:extLst>
+              <a:ext uri="{FF2B5EF4-FFF2-40B4-BE49-F238E27FC236}">
+                <a16:creationId xmlns:a16="http://schemas.microsoft.com/office/drawing/2014/main" id="{780665B1-9007-F15A-31DC-2E1EA77BDD6F}"/>
+              </a:ext>
+            </a:extLst>
+          </p:cNvPr>
+          <p:cNvCxnSpPr>
+            <a:cxnSpLocks/>
+            <a:stCxn id="8" idx="2"/>
+            <a:endCxn id="9" idx="0"/>
+          </p:cNvCxnSpPr>
+          <p:nvPr/>
+        </p:nvCxnSpPr>
+        <p:spPr bwMode="auto">
+          <a:xfrm flipH="1">
+            <a:off x="3965060" y="3810277"/>
+            <a:ext cx="1018386" cy="226638"/>
+          </a:xfrm>
+          <a:prstGeom prst="straightConnector1">
+            <a:avLst/>
+          </a:prstGeom>
+          <a:solidFill>
+            <a:schemeClr val="accent1"/>
+          </a:solidFill>
+          <a:ln w="28575" cap="flat" cmpd="sng" algn="ctr">
+            <a:solidFill>
+              <a:schemeClr val="tx1"/>
+            </a:solidFill>
+            <a:prstDash val="solid"/>
+            <a:round/>
+            <a:headEnd type="none" w="med" len="med"/>
+            <a:tailEnd type="arrow"/>
+          </a:ln>
+          <a:effectLst/>
+        </p:spPr>
+      </p:cxnSp>
+      <p:cxnSp>
+        <p:nvCxnSpPr>
+          <p:cNvPr id="48" name="Curved Connector 47">
+            <a:extLst>
+              <a:ext uri="{FF2B5EF4-FFF2-40B4-BE49-F238E27FC236}">
+                <a16:creationId xmlns:a16="http://schemas.microsoft.com/office/drawing/2014/main" id="{8903E27A-83A6-395D-3AC0-BFFA6CD44EB5}"/>
+              </a:ext>
+            </a:extLst>
+          </p:cNvPr>
+          <p:cNvCxnSpPr>
+            <a:cxnSpLocks/>
+            <a:stCxn id="9" idx="2"/>
+            <a:endCxn id="6" idx="0"/>
+          </p:cNvCxnSpPr>
+          <p:nvPr/>
+        </p:nvCxnSpPr>
+        <p:spPr bwMode="auto">
+          <a:xfrm rot="5400000" flipH="1">
+            <a:off x="2444471" y="2943029"/>
+            <a:ext cx="2784021" cy="257156"/>
+          </a:xfrm>
+          <a:prstGeom prst="curvedConnector5">
+            <a:avLst>
+              <a:gd name="adj1" fmla="val -8211"/>
+              <a:gd name="adj2" fmla="val 923957"/>
+              <a:gd name="adj3" fmla="val 108211"/>
+            </a:avLst>
+          </a:prstGeom>
+          <a:solidFill>
+            <a:schemeClr val="accent1"/>
+          </a:solidFill>
+          <a:ln w="28575" cap="flat" cmpd="sng" algn="ctr">
+            <a:solidFill>
+              <a:schemeClr val="tx1"/>
+            </a:solidFill>
+            <a:prstDash val="solid"/>
+            <a:round/>
+            <a:headEnd type="none" w="med" len="med"/>
+            <a:tailEnd type="arrow"/>
+          </a:ln>
+          <a:effectLst/>
+        </p:spPr>
+      </p:cxnSp>
+      <p:cxnSp>
+        <p:nvCxnSpPr>
+          <p:cNvPr id="53" name="Straight Arrow Connector 52">
+            <a:extLst>
+              <a:ext uri="{FF2B5EF4-FFF2-40B4-BE49-F238E27FC236}">
+                <a16:creationId xmlns:a16="http://schemas.microsoft.com/office/drawing/2014/main" id="{D4DFCC40-6360-607B-5933-643A1A5BFACD}"/>
+              </a:ext>
+            </a:extLst>
+          </p:cNvPr>
+          <p:cNvCxnSpPr>
+            <a:cxnSpLocks/>
+            <a:stCxn id="9" idx="2"/>
+          </p:cNvCxnSpPr>
+          <p:nvPr/>
+        </p:nvCxnSpPr>
+        <p:spPr bwMode="auto">
+          <a:xfrm>
+            <a:off x="3965060" y="4463617"/>
+            <a:ext cx="102884" cy="577490"/>
+          </a:xfrm>
+          <a:prstGeom prst="straightConnector1">
+            <a:avLst/>
+          </a:prstGeom>
+          <a:solidFill>
+            <a:schemeClr val="accent1"/>
+          </a:solidFill>
+          <a:ln w="28575" cap="flat" cmpd="sng" algn="ctr">
+            <a:solidFill>
+              <a:schemeClr val="tx1"/>
+            </a:solidFill>
+            <a:prstDash val="solid"/>
+            <a:round/>
+            <a:headEnd type="none" w="med" len="med"/>
+            <a:tailEnd type="arrow"/>
+          </a:ln>
+          <a:effectLst/>
+        </p:spPr>
+      </p:cxnSp>
+      <p:cxnSp>
+        <p:nvCxnSpPr>
+          <p:cNvPr id="22" name="Straight Arrow Connector 21">
+            <a:extLst>
+              <a:ext uri="{FF2B5EF4-FFF2-40B4-BE49-F238E27FC236}">
+                <a16:creationId xmlns:a16="http://schemas.microsoft.com/office/drawing/2014/main" id="{1604E62F-FFFF-D2FB-1EB2-5218ECD737EC}"/>
+              </a:ext>
+            </a:extLst>
+          </p:cNvPr>
+          <p:cNvCxnSpPr>
+            <a:cxnSpLocks/>
+          </p:cNvCxnSpPr>
+          <p:nvPr/>
+        </p:nvCxnSpPr>
+        <p:spPr bwMode="auto">
+          <a:xfrm>
+            <a:off x="3829383" y="1243242"/>
+            <a:ext cx="0" cy="432048"/>
+          </a:xfrm>
+          <a:prstGeom prst="straightConnector1">
+            <a:avLst/>
+          </a:prstGeom>
+          <a:solidFill>
+            <a:schemeClr val="accent1"/>
+          </a:solidFill>
+          <a:ln w="28575" cap="flat" cmpd="sng" algn="ctr">
+            <a:solidFill>
+              <a:schemeClr val="tx1"/>
+            </a:solidFill>
+            <a:prstDash val="solid"/>
+            <a:round/>
+            <a:headEnd type="none" w="med" len="med"/>
+            <a:tailEnd type="arrow"/>
+          </a:ln>
+          <a:effectLst/>
+        </p:spPr>
+      </p:cxnSp>
+      <p:sp>
+        <p:nvSpPr>
+          <p:cNvPr id="33" name="Rectangle 32">
+            <a:extLst>
+              <a:ext uri="{FF2B5EF4-FFF2-40B4-BE49-F238E27FC236}">
+                <a16:creationId xmlns:a16="http://schemas.microsoft.com/office/drawing/2014/main" id="{DB909E8F-F690-A49D-320E-D29E89233A06}"/>
+              </a:ext>
+            </a:extLst>
+          </p:cNvPr>
+          <p:cNvSpPr/>
+          <p:nvPr/>
+        </p:nvSpPr>
+        <p:spPr bwMode="auto">
+          <a:xfrm>
+            <a:off x="3282672" y="377626"/>
+            <a:ext cx="1079705" cy="875268"/>
+          </a:xfrm>
+          <a:prstGeom prst="rect">
+            <a:avLst/>
+          </a:prstGeom>
+          <a:solidFill>
+            <a:schemeClr val="accent5">
+              <a:lumMod val="40000"/>
+              <a:lumOff val="60000"/>
+            </a:schemeClr>
+          </a:solidFill>
+          <a:ln w="9525" cap="flat" cmpd="sng" algn="ctr">
+            <a:solidFill>
+              <a:schemeClr val="tx1"/>
+            </a:solidFill>
+            <a:prstDash val="solid"/>
+            <a:round/>
+            <a:headEnd type="none" w="med" len="med"/>
+            <a:tailEnd type="none" w="med" len="med"/>
+          </a:ln>
+          <a:effectLst/>
+        </p:spPr>
+        <p:txBody>
+          <a:bodyPr vert="horz" wrap="square" lIns="68580" tIns="34290" rIns="68580" bIns="34290" numCol="1" rtlCol="0" anchor="t" anchorCtr="0" compatLnSpc="1">
+            <a:prstTxWarp prst="textNoShape">
+              <a:avLst/>
+            </a:prstTxWarp>
+          </a:bodyPr>
+          <a:lstStyle/>
+          <a:p>
+            <a:pPr algn="ctr"/>
+            <a:r>
+              <a:rPr lang="en-CA" sz="1800" dirty="0">
+                <a:latin typeface="Calibri"/>
+              </a:rPr>
+              <a:t>b1 = 0</a:t>
+            </a:r>
+          </a:p>
+          <a:p>
+            <a:pPr algn="ctr"/>
+            <a:r>
+              <a:rPr lang="en-CA" sz="1800" dirty="0">
+                <a:latin typeface="Calibri"/>
+              </a:rPr>
+              <a:t>c1 = 0</a:t>
+            </a:r>
+          </a:p>
+          <a:p>
+            <a:pPr algn="ctr"/>
+            <a:r>
+              <a:rPr lang="en-CA" sz="1800" dirty="0">
+                <a:latin typeface="Calibri"/>
+              </a:rPr>
+              <a:t>f1 = 0</a:t>
+            </a:r>
+          </a:p>
+        </p:txBody>
+      </p:sp>
+      <p:grpSp>
+        <p:nvGrpSpPr>
+          <p:cNvPr id="149" name="Group 148">
+            <a:extLst>
+              <a:ext uri="{FF2B5EF4-FFF2-40B4-BE49-F238E27FC236}">
+                <a16:creationId xmlns:a16="http://schemas.microsoft.com/office/drawing/2014/main" id="{08F09A5D-8AAC-DF55-DAC0-D6467BB00020}"/>
+              </a:ext>
+            </a:extLst>
+          </p:cNvPr>
+          <p:cNvGrpSpPr/>
+          <p:nvPr/>
+        </p:nvGrpSpPr>
+        <p:grpSpPr>
+          <a:xfrm>
+            <a:off x="5834149" y="2106688"/>
+            <a:ext cx="754228" cy="369332"/>
+            <a:chOff x="3340520" y="2823319"/>
+            <a:chExt cx="1005637" cy="492442"/>
+          </a:xfrm>
+        </p:grpSpPr>
+        <p:sp>
+          <p:nvSpPr>
+            <p:cNvPr id="150" name="Oval 149">
+              <a:extLst>
+                <a:ext uri="{FF2B5EF4-FFF2-40B4-BE49-F238E27FC236}">
+                  <a16:creationId xmlns:a16="http://schemas.microsoft.com/office/drawing/2014/main" id="{D0E11A4A-9551-F506-9640-6FA5D0AA97D7}"/>
+                </a:ext>
+              </a:extLst>
+            </p:cNvPr>
+            <p:cNvSpPr/>
+            <p:nvPr/>
+          </p:nvSpPr>
+          <p:spPr bwMode="auto">
+            <a:xfrm>
+              <a:off x="4149772" y="2996952"/>
+              <a:ext cx="196385" cy="216024"/>
+            </a:xfrm>
+            <a:prstGeom prst="ellipse">
+              <a:avLst/>
+            </a:prstGeom>
+            <a:solidFill>
+              <a:schemeClr val="tx1"/>
+            </a:solidFill>
+            <a:ln w="9525" cap="flat" cmpd="sng" algn="ctr">
+              <a:solidFill>
+                <a:schemeClr val="tx1"/>
+              </a:solidFill>
+              <a:prstDash val="solid"/>
+              <a:round/>
+              <a:headEnd type="none" w="med" len="med"/>
+              <a:tailEnd type="none" w="med" len="med"/>
+            </a:ln>
+            <a:effectLst/>
+          </p:spPr>
+          <p:txBody>
+            <a:bodyPr vert="horz" wrap="square" lIns="68580" tIns="34290" rIns="68580" bIns="34290" numCol="1" rtlCol="0" anchor="t" anchorCtr="0" compatLnSpc="1">
+              <a:prstTxWarp prst="textNoShape">
+                <a:avLst/>
+              </a:prstTxWarp>
+            </a:bodyPr>
+            <a:lstStyle/>
+            <a:p>
+              <a:pPr defTabSz="685800"/>
+              <a:endParaRPr lang="en-CA" sz="1800" dirty="0">
+                <a:latin typeface="Calibri"/>
+              </a:endParaRPr>
+            </a:p>
+          </p:txBody>
+        </p:sp>
+        <p:sp>
+          <p:nvSpPr>
+            <p:cNvPr id="151" name="TextBox 150">
+              <a:extLst>
+                <a:ext uri="{FF2B5EF4-FFF2-40B4-BE49-F238E27FC236}">
+                  <a16:creationId xmlns:a16="http://schemas.microsoft.com/office/drawing/2014/main" id="{A218E7BC-111D-19D5-74A7-243FD8F644A7}"/>
+                </a:ext>
+              </a:extLst>
+            </p:cNvPr>
+            <p:cNvSpPr txBox="1"/>
+            <p:nvPr/>
+          </p:nvSpPr>
+          <p:spPr>
+            <a:xfrm>
+              <a:off x="3340520" y="2823319"/>
+              <a:ext cx="861621" cy="492442"/>
+            </a:xfrm>
+            <a:prstGeom prst="rect">
+              <a:avLst/>
+            </a:prstGeom>
+            <a:noFill/>
+          </p:spPr>
+          <p:txBody>
+            <a:bodyPr wrap="square" rtlCol="0">
+              <a:spAutoFit/>
+            </a:bodyPr>
+            <a:lstStyle/>
+            <a:p>
+              <a:r>
+                <a:rPr lang="en-CA" sz="1800" b="1" dirty="0">
+                  <a:solidFill>
+                    <a:srgbClr val="00B050"/>
+                  </a:solidFill>
+                  <a:latin typeface="Calibri"/>
+                </a:rPr>
+                <a:t>r</a:t>
+              </a:r>
+              <a:r>
+                <a:rPr lang="en-CA" sz="1800" b="1" baseline="-25000" dirty="0">
+                  <a:solidFill>
+                    <a:srgbClr val="00B050"/>
+                  </a:solidFill>
+                  <a:latin typeface="Calibri"/>
+                </a:rPr>
+                <a:t>2</a:t>
+              </a:r>
+              <a:r>
+                <a:rPr lang="en-CA" sz="1800" b="1" dirty="0">
+                  <a:latin typeface="Calibri"/>
+                </a:rPr>
+                <a:t> e1</a:t>
+              </a:r>
+            </a:p>
+          </p:txBody>
+        </p:sp>
+      </p:grpSp>
+      <p:cxnSp>
+        <p:nvCxnSpPr>
+          <p:cNvPr id="152" name="Straight Connector 151">
+            <a:extLst>
+              <a:ext uri="{FF2B5EF4-FFF2-40B4-BE49-F238E27FC236}">
+                <a16:creationId xmlns:a16="http://schemas.microsoft.com/office/drawing/2014/main" id="{3494C1F8-B089-D437-D8BD-721A3541B031}"/>
+              </a:ext>
+            </a:extLst>
+          </p:cNvPr>
+          <p:cNvCxnSpPr>
+            <a:stCxn id="150" idx="0"/>
+          </p:cNvCxnSpPr>
+          <p:nvPr/>
+        </p:nvCxnSpPr>
+        <p:spPr bwMode="auto">
+          <a:xfrm flipH="1" flipV="1">
+            <a:off x="6507368" y="1696851"/>
+            <a:ext cx="7365" cy="540060"/>
+          </a:xfrm>
+          <a:prstGeom prst="line">
+            <a:avLst/>
+          </a:prstGeom>
+          <a:solidFill>
+            <a:schemeClr val="accent1"/>
+          </a:solidFill>
+          <a:ln w="9525" cap="flat" cmpd="sng" algn="ctr">
+            <a:solidFill>
+              <a:schemeClr val="tx1"/>
+            </a:solidFill>
+            <a:prstDash val="solid"/>
+            <a:round/>
+            <a:headEnd type="none" w="med" len="med"/>
+            <a:tailEnd type="none" w="med" len="med"/>
+          </a:ln>
+          <a:effectLst/>
+        </p:spPr>
+      </p:cxnSp>
+      <p:grpSp>
+        <p:nvGrpSpPr>
+          <p:cNvPr id="153" name="Group 152">
+            <a:extLst>
+              <a:ext uri="{FF2B5EF4-FFF2-40B4-BE49-F238E27FC236}">
+                <a16:creationId xmlns:a16="http://schemas.microsoft.com/office/drawing/2014/main" id="{267412E3-1BE4-C825-B8B0-97C16560C7DD}"/>
+              </a:ext>
+            </a:extLst>
+          </p:cNvPr>
+          <p:cNvGrpSpPr/>
+          <p:nvPr/>
+        </p:nvGrpSpPr>
+        <p:grpSpPr>
+          <a:xfrm>
+            <a:off x="5904805" y="1341023"/>
+            <a:ext cx="676207" cy="369332"/>
+            <a:chOff x="3444548" y="2738537"/>
+            <a:chExt cx="901609" cy="492443"/>
+          </a:xfrm>
+        </p:grpSpPr>
+        <p:sp>
+          <p:nvSpPr>
+            <p:cNvPr id="154" name="Oval 153">
+              <a:extLst>
+                <a:ext uri="{FF2B5EF4-FFF2-40B4-BE49-F238E27FC236}">
+                  <a16:creationId xmlns:a16="http://schemas.microsoft.com/office/drawing/2014/main" id="{35FAD3D4-72A0-97F2-CF9C-CCDC15DC41A5}"/>
+                </a:ext>
+              </a:extLst>
+            </p:cNvPr>
+            <p:cNvSpPr/>
+            <p:nvPr/>
+          </p:nvSpPr>
+          <p:spPr bwMode="auto">
+            <a:xfrm>
+              <a:off x="4149772" y="2996952"/>
+              <a:ext cx="196385" cy="216024"/>
+            </a:xfrm>
+            <a:prstGeom prst="ellipse">
+              <a:avLst/>
+            </a:prstGeom>
+            <a:solidFill>
+              <a:schemeClr val="tx1"/>
+            </a:solidFill>
+            <a:ln w="9525" cap="flat" cmpd="sng" algn="ctr">
+              <a:solidFill>
+                <a:schemeClr val="tx1"/>
+              </a:solidFill>
+              <a:prstDash val="solid"/>
+              <a:round/>
+              <a:headEnd type="none" w="med" len="med"/>
+              <a:tailEnd type="none" w="med" len="med"/>
+            </a:ln>
+            <a:effectLst/>
+          </p:spPr>
+          <p:txBody>
+            <a:bodyPr vert="horz" wrap="square" lIns="68580" tIns="34290" rIns="68580" bIns="34290" numCol="1" rtlCol="0" anchor="t" anchorCtr="0" compatLnSpc="1">
+              <a:prstTxWarp prst="textNoShape">
+                <a:avLst/>
+              </a:prstTxWarp>
+            </a:bodyPr>
+            <a:lstStyle/>
+            <a:p>
+              <a:pPr defTabSz="685800"/>
+              <a:endParaRPr lang="en-CA" sz="1800" dirty="0">
+                <a:latin typeface="Calibri"/>
+              </a:endParaRPr>
+            </a:p>
+          </p:txBody>
+        </p:sp>
+        <p:sp>
+          <p:nvSpPr>
+            <p:cNvPr id="155" name="TextBox 154">
+              <a:extLst>
+                <a:ext uri="{FF2B5EF4-FFF2-40B4-BE49-F238E27FC236}">
+                  <a16:creationId xmlns:a16="http://schemas.microsoft.com/office/drawing/2014/main" id="{B3935BB1-B0B4-C997-CFB3-D05C210CD1DB}"/>
+                </a:ext>
+              </a:extLst>
+            </p:cNvPr>
+            <p:cNvSpPr txBox="1"/>
+            <p:nvPr/>
+          </p:nvSpPr>
+          <p:spPr>
+            <a:xfrm>
+              <a:off x="3444548" y="2738537"/>
+              <a:ext cx="839421" cy="492443"/>
+            </a:xfrm>
+            <a:prstGeom prst="rect">
+              <a:avLst/>
+            </a:prstGeom>
+            <a:noFill/>
+          </p:spPr>
+          <p:txBody>
+            <a:bodyPr wrap="square" rtlCol="0">
+              <a:spAutoFit/>
+            </a:bodyPr>
+            <a:lstStyle/>
+            <a:p>
+              <a:r>
+                <a:rPr lang="en-CA" sz="1800" b="1" dirty="0">
+                  <a:solidFill>
+                    <a:schemeClr val="accent2"/>
+                  </a:solidFill>
+                  <a:latin typeface="Calibri"/>
+                </a:rPr>
+                <a:t>r</a:t>
+              </a:r>
+              <a:r>
+                <a:rPr lang="en-CA" sz="1800" b="1" baseline="-25000" dirty="0">
+                  <a:solidFill>
+                    <a:schemeClr val="accent2"/>
+                  </a:solidFill>
+                  <a:latin typeface="Calibri"/>
+                </a:rPr>
+                <a:t>1</a:t>
+              </a:r>
+              <a:r>
+                <a:rPr lang="en-CA" sz="1800" b="1" dirty="0">
+                  <a:latin typeface="Calibri"/>
+                </a:rPr>
+                <a:t> f1</a:t>
+              </a:r>
+            </a:p>
+          </p:txBody>
+        </p:sp>
+      </p:grpSp>
+      <p:grpSp>
+        <p:nvGrpSpPr>
+          <p:cNvPr id="156" name="Group 155">
+            <a:extLst>
+              <a:ext uri="{FF2B5EF4-FFF2-40B4-BE49-F238E27FC236}">
+                <a16:creationId xmlns:a16="http://schemas.microsoft.com/office/drawing/2014/main" id="{EE9D2B98-B185-0E17-79FE-341355C10E78}"/>
+              </a:ext>
+            </a:extLst>
+          </p:cNvPr>
+          <p:cNvGrpSpPr/>
+          <p:nvPr/>
+        </p:nvGrpSpPr>
+        <p:grpSpPr>
+          <a:xfrm>
+            <a:off x="7772732" y="1296597"/>
+            <a:ext cx="837060" cy="400255"/>
+            <a:chOff x="4149772" y="2679303"/>
+            <a:chExt cx="1116080" cy="533673"/>
+          </a:xfrm>
+        </p:grpSpPr>
+        <p:sp>
+          <p:nvSpPr>
+            <p:cNvPr id="157" name="Oval 156">
+              <a:extLst>
+                <a:ext uri="{FF2B5EF4-FFF2-40B4-BE49-F238E27FC236}">
+                  <a16:creationId xmlns:a16="http://schemas.microsoft.com/office/drawing/2014/main" id="{BAD34EF1-4DD1-0F8D-3B21-3F3723886686}"/>
+                </a:ext>
+              </a:extLst>
+            </p:cNvPr>
+            <p:cNvSpPr/>
+            <p:nvPr/>
+          </p:nvSpPr>
+          <p:spPr bwMode="auto">
+            <a:xfrm>
+              <a:off x="4149772" y="2996952"/>
+              <a:ext cx="196385" cy="216024"/>
+            </a:xfrm>
+            <a:prstGeom prst="ellipse">
+              <a:avLst/>
+            </a:prstGeom>
+            <a:solidFill>
+              <a:schemeClr val="tx1"/>
+            </a:solidFill>
+            <a:ln w="9525" cap="flat" cmpd="sng" algn="ctr">
+              <a:solidFill>
+                <a:schemeClr val="tx1"/>
+              </a:solidFill>
+              <a:prstDash val="solid"/>
+              <a:round/>
+              <a:headEnd type="none" w="med" len="med"/>
+              <a:tailEnd type="none" w="med" len="med"/>
+            </a:ln>
+            <a:effectLst/>
+          </p:spPr>
+          <p:txBody>
+            <a:bodyPr vert="horz" wrap="square" lIns="68580" tIns="34290" rIns="68580" bIns="34290" numCol="1" rtlCol="0" anchor="t" anchorCtr="0" compatLnSpc="1">
+              <a:prstTxWarp prst="textNoShape">
+                <a:avLst/>
+              </a:prstTxWarp>
+            </a:bodyPr>
+            <a:lstStyle/>
+            <a:p>
+              <a:pPr defTabSz="685800"/>
+              <a:endParaRPr lang="en-CA" sz="1800" dirty="0">
+                <a:latin typeface="Calibri"/>
+              </a:endParaRPr>
+            </a:p>
+          </p:txBody>
+        </p:sp>
+        <p:sp>
+          <p:nvSpPr>
+            <p:cNvPr id="158" name="TextBox 157">
+              <a:extLst>
+                <a:ext uri="{FF2B5EF4-FFF2-40B4-BE49-F238E27FC236}">
+                  <a16:creationId xmlns:a16="http://schemas.microsoft.com/office/drawing/2014/main" id="{309AB7F0-79A1-4DF1-4EA1-7BFEAD07E04A}"/>
+                </a:ext>
+              </a:extLst>
+            </p:cNvPr>
+            <p:cNvSpPr txBox="1"/>
+            <p:nvPr/>
+          </p:nvSpPr>
+          <p:spPr>
+            <a:xfrm>
+              <a:off x="4380652" y="2679303"/>
+              <a:ext cx="885200" cy="492442"/>
+            </a:xfrm>
+            <a:prstGeom prst="rect">
+              <a:avLst/>
+            </a:prstGeom>
+            <a:noFill/>
+          </p:spPr>
+          <p:txBody>
+            <a:bodyPr wrap="square" rtlCol="0">
+              <a:spAutoFit/>
+            </a:bodyPr>
+            <a:lstStyle/>
+            <a:p>
+              <a:r>
+                <a:rPr lang="en-CA" sz="1800" b="1" dirty="0">
+                  <a:latin typeface="Calibri"/>
+                </a:rPr>
+                <a:t>b1 </a:t>
+              </a:r>
+              <a:r>
+                <a:rPr lang="en-CA" sz="1800" b="1" dirty="0">
+                  <a:solidFill>
+                    <a:srgbClr val="FF0000"/>
+                  </a:solidFill>
+                  <a:latin typeface="Calibri"/>
+                </a:rPr>
+                <a:t>r</a:t>
+              </a:r>
+              <a:r>
+                <a:rPr lang="en-CA" sz="1800" b="1" baseline="-25000" dirty="0">
+                  <a:solidFill>
+                    <a:srgbClr val="FF0000"/>
+                  </a:solidFill>
+                  <a:latin typeface="Calibri"/>
+                </a:rPr>
+                <a:t>3</a:t>
+              </a:r>
+              <a:endParaRPr lang="en-CA" sz="1800" b="1" dirty="0">
+                <a:solidFill>
+                  <a:srgbClr val="FF0000"/>
+                </a:solidFill>
+                <a:latin typeface="Calibri"/>
+              </a:endParaRPr>
+            </a:p>
+          </p:txBody>
+        </p:sp>
+      </p:grpSp>
+      <p:cxnSp>
+        <p:nvCxnSpPr>
+          <p:cNvPr id="159" name="Straight Connector 158">
+            <a:extLst>
+              <a:ext uri="{FF2B5EF4-FFF2-40B4-BE49-F238E27FC236}">
+                <a16:creationId xmlns:a16="http://schemas.microsoft.com/office/drawing/2014/main" id="{62820763-3D74-F120-D9C1-910000DFDDD6}"/>
+              </a:ext>
+            </a:extLst>
+          </p:cNvPr>
+          <p:cNvCxnSpPr>
+            <a:stCxn id="157" idx="2"/>
+          </p:cNvCxnSpPr>
+          <p:nvPr/>
+        </p:nvCxnSpPr>
+        <p:spPr bwMode="auto">
+          <a:xfrm flipH="1">
+            <a:off x="6581012" y="1615842"/>
+            <a:ext cx="1191720" cy="0"/>
+          </a:xfrm>
+          <a:prstGeom prst="line">
+            <a:avLst/>
+          </a:prstGeom>
+          <a:solidFill>
+            <a:schemeClr val="accent1"/>
+          </a:solidFill>
+          <a:ln w="9525" cap="flat" cmpd="sng" algn="ctr">
+            <a:solidFill>
+              <a:schemeClr val="tx1"/>
+            </a:solidFill>
+            <a:prstDash val="solid"/>
+            <a:round/>
+            <a:headEnd type="none" w="med" len="med"/>
+            <a:tailEnd type="none" w="med" len="med"/>
+          </a:ln>
+          <a:effectLst/>
+        </p:spPr>
+      </p:cxnSp>
+      <p:cxnSp>
+        <p:nvCxnSpPr>
+          <p:cNvPr id="160" name="Straight Connector 159">
+            <a:extLst>
+              <a:ext uri="{FF2B5EF4-FFF2-40B4-BE49-F238E27FC236}">
+                <a16:creationId xmlns:a16="http://schemas.microsoft.com/office/drawing/2014/main" id="{B20D3151-06FA-CC61-A049-30B044334EE9}"/>
+              </a:ext>
+            </a:extLst>
+          </p:cNvPr>
+          <p:cNvCxnSpPr>
+            <a:stCxn id="157" idx="3"/>
+          </p:cNvCxnSpPr>
+          <p:nvPr/>
+        </p:nvCxnSpPr>
+        <p:spPr bwMode="auto">
+          <a:xfrm flipH="1">
+            <a:off x="6566807" y="1673124"/>
+            <a:ext cx="1227495" cy="587514"/>
+          </a:xfrm>
+          <a:prstGeom prst="line">
+            <a:avLst/>
+          </a:prstGeom>
+          <a:solidFill>
+            <a:schemeClr val="accent1"/>
+          </a:solidFill>
+          <a:ln w="9525" cap="flat" cmpd="sng" algn="ctr">
+            <a:solidFill>
+              <a:schemeClr val="tx1"/>
+            </a:solidFill>
+            <a:prstDash val="solid"/>
+            <a:round/>
+            <a:headEnd type="none" w="med" len="med"/>
+            <a:tailEnd type="none" w="med" len="med"/>
+          </a:ln>
+          <a:effectLst/>
+        </p:spPr>
+      </p:cxnSp>
+      <p:grpSp>
+        <p:nvGrpSpPr>
+          <p:cNvPr id="161" name="Group 160">
+            <a:extLst>
+              <a:ext uri="{FF2B5EF4-FFF2-40B4-BE49-F238E27FC236}">
+                <a16:creationId xmlns:a16="http://schemas.microsoft.com/office/drawing/2014/main" id="{40F1F419-20E9-DCA3-AB06-50F70E54D3AB}"/>
+              </a:ext>
+            </a:extLst>
+          </p:cNvPr>
+          <p:cNvGrpSpPr/>
+          <p:nvPr/>
+        </p:nvGrpSpPr>
+        <p:grpSpPr>
+          <a:xfrm>
+            <a:off x="7797941" y="2106688"/>
+            <a:ext cx="896670" cy="369332"/>
+            <a:chOff x="4149772" y="2823319"/>
+            <a:chExt cx="1195560" cy="492442"/>
+          </a:xfrm>
+        </p:grpSpPr>
+        <p:sp>
+          <p:nvSpPr>
+            <p:cNvPr id="162" name="Oval 161">
+              <a:extLst>
+                <a:ext uri="{FF2B5EF4-FFF2-40B4-BE49-F238E27FC236}">
+                  <a16:creationId xmlns:a16="http://schemas.microsoft.com/office/drawing/2014/main" id="{B8A941F2-5E61-E0E5-4C2F-AC201724E102}"/>
+                </a:ext>
+              </a:extLst>
+            </p:cNvPr>
+            <p:cNvSpPr/>
+            <p:nvPr/>
+          </p:nvSpPr>
+          <p:spPr bwMode="auto">
+            <a:xfrm>
+              <a:off x="4149772" y="2996952"/>
+              <a:ext cx="196385" cy="216024"/>
+            </a:xfrm>
+            <a:prstGeom prst="ellipse">
+              <a:avLst/>
+            </a:prstGeom>
+            <a:solidFill>
+              <a:schemeClr val="tx1"/>
+            </a:solidFill>
+            <a:ln w="9525" cap="flat" cmpd="sng" algn="ctr">
+              <a:solidFill>
+                <a:schemeClr val="tx1"/>
+              </a:solidFill>
+              <a:prstDash val="solid"/>
+              <a:round/>
+              <a:headEnd type="none" w="med" len="med"/>
+              <a:tailEnd type="none" w="med" len="med"/>
+            </a:ln>
+            <a:effectLst/>
+          </p:spPr>
+          <p:txBody>
+            <a:bodyPr vert="horz" wrap="square" lIns="68580" tIns="34290" rIns="68580" bIns="34290" numCol="1" rtlCol="0" anchor="t" anchorCtr="0" compatLnSpc="1">
+              <a:prstTxWarp prst="textNoShape">
+                <a:avLst/>
+              </a:prstTxWarp>
+            </a:bodyPr>
+            <a:lstStyle/>
+            <a:p>
+              <a:pPr defTabSz="685800"/>
+              <a:endParaRPr lang="en-CA" sz="1800" dirty="0">
+                <a:latin typeface="Calibri"/>
+              </a:endParaRPr>
+            </a:p>
+          </p:txBody>
+        </p:sp>
+        <p:sp>
+          <p:nvSpPr>
+            <p:cNvPr id="163" name="TextBox 162">
+              <a:extLst>
+                <a:ext uri="{FF2B5EF4-FFF2-40B4-BE49-F238E27FC236}">
+                  <a16:creationId xmlns:a16="http://schemas.microsoft.com/office/drawing/2014/main" id="{B003636D-1633-D61D-AEB5-5DCA4B05AD9D}"/>
+                </a:ext>
+              </a:extLst>
+            </p:cNvPr>
+            <p:cNvSpPr txBox="1"/>
+            <p:nvPr/>
+          </p:nvSpPr>
+          <p:spPr>
+            <a:xfrm>
+              <a:off x="4419048" y="2823319"/>
+              <a:ext cx="926284" cy="492442"/>
+            </a:xfrm>
+            <a:prstGeom prst="rect">
+              <a:avLst/>
+            </a:prstGeom>
+            <a:noFill/>
+          </p:spPr>
+          <p:txBody>
+            <a:bodyPr wrap="square" rtlCol="0">
+              <a:spAutoFit/>
+            </a:bodyPr>
+            <a:lstStyle/>
+            <a:p>
+              <a:r>
+                <a:rPr lang="en-CA" sz="1800" b="1" dirty="0">
+                  <a:latin typeface="Calibri"/>
+                </a:rPr>
+                <a:t>c1 r</a:t>
+              </a:r>
+              <a:r>
+                <a:rPr lang="en-CA" sz="1800" b="1" baseline="-25000" dirty="0">
+                  <a:latin typeface="Calibri"/>
+                </a:rPr>
+                <a:t>4</a:t>
+              </a:r>
+              <a:endParaRPr lang="en-CA" sz="1800" b="1" dirty="0">
+                <a:latin typeface="Calibri"/>
+              </a:endParaRPr>
+            </a:p>
+          </p:txBody>
+        </p:sp>
+      </p:grpSp>
+      <p:cxnSp>
+        <p:nvCxnSpPr>
+          <p:cNvPr id="164" name="Straight Connector 163">
+            <a:extLst>
+              <a:ext uri="{FF2B5EF4-FFF2-40B4-BE49-F238E27FC236}">
+                <a16:creationId xmlns:a16="http://schemas.microsoft.com/office/drawing/2014/main" id="{28721F1B-F6C3-C3F2-A4A7-8D4CDFBA4020}"/>
+              </a:ext>
+            </a:extLst>
+          </p:cNvPr>
+          <p:cNvCxnSpPr>
+            <a:stCxn id="162" idx="2"/>
+          </p:cNvCxnSpPr>
+          <p:nvPr/>
+        </p:nvCxnSpPr>
+        <p:spPr bwMode="auto">
+          <a:xfrm flipH="1" flipV="1">
+            <a:off x="6559442" y="1673124"/>
+            <a:ext cx="1238499" cy="644796"/>
+          </a:xfrm>
+          <a:prstGeom prst="line">
+            <a:avLst/>
+          </a:prstGeom>
+          <a:solidFill>
+            <a:schemeClr val="accent1"/>
+          </a:solidFill>
+          <a:ln w="9525" cap="flat" cmpd="sng" algn="ctr">
+            <a:solidFill>
+              <a:schemeClr val="tx1"/>
+            </a:solidFill>
+            <a:prstDash val="solid"/>
+            <a:round/>
+            <a:headEnd type="none" w="med" len="med"/>
+            <a:tailEnd type="none" w="med" len="med"/>
+          </a:ln>
+          <a:effectLst/>
+        </p:spPr>
+      </p:cxnSp>
+      <p:cxnSp>
+        <p:nvCxnSpPr>
+          <p:cNvPr id="165" name="Straight Connector 164">
+            <a:extLst>
+              <a:ext uri="{FF2B5EF4-FFF2-40B4-BE49-F238E27FC236}">
+                <a16:creationId xmlns:a16="http://schemas.microsoft.com/office/drawing/2014/main" id="{080DBB73-D42A-8612-FA25-AAE98982BEE5}"/>
+              </a:ext>
+            </a:extLst>
+          </p:cNvPr>
+          <p:cNvCxnSpPr>
+            <a:endCxn id="162" idx="0"/>
+          </p:cNvCxnSpPr>
+          <p:nvPr/>
+        </p:nvCxnSpPr>
+        <p:spPr bwMode="auto">
+          <a:xfrm>
+            <a:off x="7846377" y="1696851"/>
+            <a:ext cx="25209" cy="540060"/>
+          </a:xfrm>
+          <a:prstGeom prst="line">
+            <a:avLst/>
+          </a:prstGeom>
+          <a:solidFill>
+            <a:schemeClr val="accent1"/>
+          </a:solidFill>
+          <a:ln w="9525" cap="flat" cmpd="sng" algn="ctr">
+            <a:solidFill>
+              <a:schemeClr val="tx1"/>
+            </a:solidFill>
+            <a:prstDash val="solid"/>
+            <a:round/>
+            <a:headEnd type="none" w="med" len="med"/>
+            <a:tailEnd type="none" w="med" len="med"/>
+          </a:ln>
+          <a:effectLst/>
+        </p:spPr>
+      </p:cxnSp>
+      <p:cxnSp>
+        <p:nvCxnSpPr>
+          <p:cNvPr id="166" name="Straight Connector 165">
+            <a:extLst>
+              <a:ext uri="{FF2B5EF4-FFF2-40B4-BE49-F238E27FC236}">
+                <a16:creationId xmlns:a16="http://schemas.microsoft.com/office/drawing/2014/main" id="{B1DDE5F0-BBA5-936C-4B84-B29D1A3E1374}"/>
+              </a:ext>
+            </a:extLst>
+          </p:cNvPr>
+          <p:cNvCxnSpPr>
+            <a:stCxn id="162" idx="3"/>
+          </p:cNvCxnSpPr>
+          <p:nvPr/>
+        </p:nvCxnSpPr>
+        <p:spPr bwMode="auto">
+          <a:xfrm flipH="1" flipV="1">
+            <a:off x="6588377" y="2317920"/>
+            <a:ext cx="1231134" cy="57282"/>
+          </a:xfrm>
+          <a:prstGeom prst="line">
+            <a:avLst/>
+          </a:prstGeom>
+          <a:solidFill>
+            <a:schemeClr val="accent1"/>
+          </a:solidFill>
+          <a:ln w="9525" cap="flat" cmpd="sng" algn="ctr">
+            <a:solidFill>
+              <a:schemeClr val="tx1"/>
+            </a:solidFill>
+            <a:prstDash val="solid"/>
+            <a:round/>
+            <a:headEnd type="none" w="med" len="med"/>
+            <a:tailEnd type="none" w="med" len="med"/>
+          </a:ln>
+          <a:effectLst/>
+        </p:spPr>
+      </p:cxnSp>
+      <p:grpSp>
+        <p:nvGrpSpPr>
+          <p:cNvPr id="167" name="Group 166">
+            <a:extLst>
+              <a:ext uri="{FF2B5EF4-FFF2-40B4-BE49-F238E27FC236}">
+                <a16:creationId xmlns:a16="http://schemas.microsoft.com/office/drawing/2014/main" id="{65AED5CD-D01E-3C9D-2728-77F2EAD34DF0}"/>
+              </a:ext>
+            </a:extLst>
+          </p:cNvPr>
+          <p:cNvGrpSpPr/>
+          <p:nvPr/>
+        </p:nvGrpSpPr>
+        <p:grpSpPr>
+          <a:xfrm>
+            <a:off x="7081796" y="2614952"/>
+            <a:ext cx="690936" cy="477344"/>
+            <a:chOff x="4092620" y="2996952"/>
+            <a:chExt cx="921248" cy="636459"/>
+          </a:xfrm>
+        </p:grpSpPr>
+        <p:sp>
+          <p:nvSpPr>
+            <p:cNvPr id="168" name="Oval 167">
+              <a:extLst>
+                <a:ext uri="{FF2B5EF4-FFF2-40B4-BE49-F238E27FC236}">
+                  <a16:creationId xmlns:a16="http://schemas.microsoft.com/office/drawing/2014/main" id="{24FF5089-D149-9ACA-6083-E9B848D8B707}"/>
+                </a:ext>
+              </a:extLst>
+            </p:cNvPr>
+            <p:cNvSpPr/>
+            <p:nvPr/>
+          </p:nvSpPr>
+          <p:spPr bwMode="auto">
+            <a:xfrm>
+              <a:off x="4149772" y="2996952"/>
+              <a:ext cx="196385" cy="216024"/>
+            </a:xfrm>
+            <a:prstGeom prst="ellipse">
+              <a:avLst/>
+            </a:prstGeom>
+            <a:solidFill>
+              <a:schemeClr val="tx1"/>
+            </a:solidFill>
+            <a:ln w="9525" cap="flat" cmpd="sng" algn="ctr">
+              <a:solidFill>
+                <a:schemeClr val="tx1"/>
+              </a:solidFill>
+              <a:prstDash val="solid"/>
+              <a:round/>
+              <a:headEnd type="none" w="med" len="med"/>
+              <a:tailEnd type="none" w="med" len="med"/>
+            </a:ln>
+            <a:effectLst/>
+          </p:spPr>
+          <p:txBody>
+            <a:bodyPr vert="horz" wrap="square" lIns="68580" tIns="34290" rIns="68580" bIns="34290" numCol="1" rtlCol="0" anchor="t" anchorCtr="0" compatLnSpc="1">
+              <a:prstTxWarp prst="textNoShape">
+                <a:avLst/>
+              </a:prstTxWarp>
+            </a:bodyPr>
+            <a:lstStyle/>
+            <a:p>
+              <a:pPr defTabSz="685800"/>
+              <a:endParaRPr lang="en-CA" sz="1800" dirty="0">
+                <a:latin typeface="Calibri"/>
+              </a:endParaRPr>
+            </a:p>
+          </p:txBody>
+        </p:sp>
+        <p:sp>
+          <p:nvSpPr>
+            <p:cNvPr id="169" name="TextBox 168">
+              <a:extLst>
+                <a:ext uri="{FF2B5EF4-FFF2-40B4-BE49-F238E27FC236}">
+                  <a16:creationId xmlns:a16="http://schemas.microsoft.com/office/drawing/2014/main" id="{306B070E-C65E-EA72-0CEF-51D5B7A85199}"/>
+                </a:ext>
+              </a:extLst>
+            </p:cNvPr>
+            <p:cNvSpPr txBox="1"/>
+            <p:nvPr/>
+          </p:nvSpPr>
+          <p:spPr>
+            <a:xfrm>
+              <a:off x="4092620" y="3140968"/>
+              <a:ext cx="921248" cy="492443"/>
+            </a:xfrm>
+            <a:prstGeom prst="rect">
+              <a:avLst/>
+            </a:prstGeom>
+            <a:noFill/>
+          </p:spPr>
+          <p:txBody>
+            <a:bodyPr wrap="square" rtlCol="0">
+              <a:spAutoFit/>
+            </a:bodyPr>
+            <a:lstStyle/>
+            <a:p>
+              <a:r>
+                <a:rPr lang="en-CA" sz="1800" b="1" dirty="0">
+                  <a:latin typeface="Calibri"/>
+                </a:rPr>
+                <a:t>d1  </a:t>
+              </a:r>
+              <a:r>
+                <a:rPr lang="en-CA" sz="1800" b="1" dirty="0">
+                  <a:solidFill>
+                    <a:srgbClr val="FF0000"/>
+                  </a:solidFill>
+                  <a:latin typeface="Calibri"/>
+                </a:rPr>
+                <a:t>r</a:t>
+              </a:r>
+              <a:r>
+                <a:rPr lang="en-CA" sz="1800" b="1" baseline="-25000" dirty="0">
+                  <a:solidFill>
+                    <a:srgbClr val="FF0000"/>
+                  </a:solidFill>
+                  <a:latin typeface="Calibri"/>
+                </a:rPr>
+                <a:t>3</a:t>
+              </a:r>
+              <a:r>
+                <a:rPr lang="en-CA" sz="1800" b="1" dirty="0">
+                  <a:latin typeface="Calibri"/>
+                </a:rPr>
+                <a:t> </a:t>
+              </a:r>
+              <a:endParaRPr lang="en-CA" sz="1800" b="1" dirty="0">
+                <a:solidFill>
+                  <a:srgbClr val="FF0000"/>
+                </a:solidFill>
+                <a:latin typeface="Calibri"/>
+              </a:endParaRPr>
+            </a:p>
+          </p:txBody>
+        </p:sp>
+      </p:grpSp>
+      <p:cxnSp>
+        <p:nvCxnSpPr>
+          <p:cNvPr id="170" name="Straight Connector 169">
+            <a:extLst>
+              <a:ext uri="{FF2B5EF4-FFF2-40B4-BE49-F238E27FC236}">
+                <a16:creationId xmlns:a16="http://schemas.microsoft.com/office/drawing/2014/main" id="{C4F239C4-F70A-EF13-DB1E-16F8012C7F16}"/>
+              </a:ext>
+            </a:extLst>
+          </p:cNvPr>
+          <p:cNvCxnSpPr>
+            <a:stCxn id="168" idx="1"/>
+          </p:cNvCxnSpPr>
+          <p:nvPr/>
+        </p:nvCxnSpPr>
+        <p:spPr bwMode="auto">
+          <a:xfrm flipH="1" flipV="1">
+            <a:off x="6559442" y="1673124"/>
+            <a:ext cx="586788" cy="965556"/>
+          </a:xfrm>
+          <a:prstGeom prst="line">
+            <a:avLst/>
+          </a:prstGeom>
+          <a:solidFill>
+            <a:schemeClr val="accent1"/>
+          </a:solidFill>
+          <a:ln w="9525" cap="flat" cmpd="sng" algn="ctr">
+            <a:solidFill>
+              <a:schemeClr val="tx1"/>
+            </a:solidFill>
+            <a:prstDash val="solid"/>
+            <a:round/>
+            <a:headEnd type="none" w="med" len="med"/>
+            <a:tailEnd type="none" w="med" len="med"/>
+          </a:ln>
+          <a:effectLst/>
+        </p:spPr>
+      </p:cxnSp>
+      <p:cxnSp>
+        <p:nvCxnSpPr>
+          <p:cNvPr id="171" name="Straight Connector 170">
+            <a:extLst>
+              <a:ext uri="{FF2B5EF4-FFF2-40B4-BE49-F238E27FC236}">
+                <a16:creationId xmlns:a16="http://schemas.microsoft.com/office/drawing/2014/main" id="{353AFEC9-6605-09E0-CDEE-315B6B2544A3}"/>
+              </a:ext>
+            </a:extLst>
+          </p:cNvPr>
+          <p:cNvCxnSpPr>
+            <a:stCxn id="168" idx="2"/>
+          </p:cNvCxnSpPr>
+          <p:nvPr/>
+        </p:nvCxnSpPr>
+        <p:spPr bwMode="auto">
+          <a:xfrm flipH="1" flipV="1">
+            <a:off x="6566807" y="2375202"/>
+            <a:ext cx="557853" cy="320760"/>
+          </a:xfrm>
+          <a:prstGeom prst="line">
+            <a:avLst/>
+          </a:prstGeom>
+          <a:solidFill>
+            <a:schemeClr val="accent1"/>
+          </a:solidFill>
+          <a:ln w="9525" cap="flat" cmpd="sng" algn="ctr">
+            <a:solidFill>
+              <a:schemeClr val="tx1"/>
+            </a:solidFill>
+            <a:prstDash val="solid"/>
+            <a:round/>
+            <a:headEnd type="none" w="med" len="med"/>
+            <a:tailEnd type="none" w="med" len="med"/>
+          </a:ln>
+          <a:effectLst/>
+        </p:spPr>
+      </p:cxnSp>
+      <p:cxnSp>
+        <p:nvCxnSpPr>
+          <p:cNvPr id="172" name="Straight Connector 171">
+            <a:extLst>
+              <a:ext uri="{FF2B5EF4-FFF2-40B4-BE49-F238E27FC236}">
+                <a16:creationId xmlns:a16="http://schemas.microsoft.com/office/drawing/2014/main" id="{1000C229-3D85-5374-7860-6FDA8E66CA35}"/>
+              </a:ext>
+            </a:extLst>
+          </p:cNvPr>
+          <p:cNvCxnSpPr>
+            <a:endCxn id="168" idx="6"/>
+          </p:cNvCxnSpPr>
+          <p:nvPr/>
+        </p:nvCxnSpPr>
+        <p:spPr bwMode="auto">
+          <a:xfrm flipH="1">
+            <a:off x="7271949" y="2398929"/>
+            <a:ext cx="599637" cy="297033"/>
+          </a:xfrm>
+          <a:prstGeom prst="line">
+            <a:avLst/>
+          </a:prstGeom>
+          <a:solidFill>
+            <a:schemeClr val="accent1"/>
+          </a:solidFill>
+          <a:ln w="9525" cap="flat" cmpd="sng" algn="ctr">
+            <a:solidFill>
+              <a:schemeClr val="tx1"/>
+            </a:solidFill>
+            <a:prstDash val="solid"/>
+            <a:round/>
+            <a:headEnd type="none" w="med" len="med"/>
+            <a:tailEnd type="none" w="med" len="med"/>
+          </a:ln>
+          <a:effectLst/>
+        </p:spPr>
+      </p:cxnSp>
+      <p:grpSp>
+        <p:nvGrpSpPr>
+          <p:cNvPr id="173" name="Group 172">
+            <a:extLst>
+              <a:ext uri="{FF2B5EF4-FFF2-40B4-BE49-F238E27FC236}">
+                <a16:creationId xmlns:a16="http://schemas.microsoft.com/office/drawing/2014/main" id="{CED2CC4C-6937-5FF5-855C-7977879CF664}"/>
+              </a:ext>
+            </a:extLst>
+          </p:cNvPr>
+          <p:cNvGrpSpPr/>
+          <p:nvPr/>
+        </p:nvGrpSpPr>
+        <p:grpSpPr>
+          <a:xfrm>
+            <a:off x="7092938" y="799827"/>
+            <a:ext cx="679794" cy="572989"/>
+            <a:chOff x="4092620" y="2448991"/>
+            <a:chExt cx="906392" cy="763985"/>
+          </a:xfrm>
+        </p:grpSpPr>
+        <p:sp>
+          <p:nvSpPr>
+            <p:cNvPr id="174" name="Oval 173">
+              <a:extLst>
+                <a:ext uri="{FF2B5EF4-FFF2-40B4-BE49-F238E27FC236}">
+                  <a16:creationId xmlns:a16="http://schemas.microsoft.com/office/drawing/2014/main" id="{B04BCF43-CC96-5B44-D823-0366E0976C59}"/>
+                </a:ext>
+              </a:extLst>
+            </p:cNvPr>
+            <p:cNvSpPr/>
+            <p:nvPr/>
+          </p:nvSpPr>
+          <p:spPr bwMode="auto">
+            <a:xfrm>
+              <a:off x="4149772" y="2996952"/>
+              <a:ext cx="196385" cy="216024"/>
+            </a:xfrm>
+            <a:prstGeom prst="ellipse">
+              <a:avLst/>
+            </a:prstGeom>
+            <a:solidFill>
+              <a:schemeClr val="tx1"/>
+            </a:solidFill>
+            <a:ln w="9525" cap="flat" cmpd="sng" algn="ctr">
+              <a:solidFill>
+                <a:schemeClr val="tx1"/>
+              </a:solidFill>
+              <a:prstDash val="solid"/>
+              <a:round/>
+              <a:headEnd type="none" w="med" len="med"/>
+              <a:tailEnd type="none" w="med" len="med"/>
+            </a:ln>
+            <a:effectLst/>
+          </p:spPr>
+          <p:txBody>
+            <a:bodyPr vert="horz" wrap="square" lIns="68580" tIns="34290" rIns="68580" bIns="34290" numCol="1" rtlCol="0" anchor="t" anchorCtr="0" compatLnSpc="1">
+              <a:prstTxWarp prst="textNoShape">
+                <a:avLst/>
+              </a:prstTxWarp>
+            </a:bodyPr>
+            <a:lstStyle/>
+            <a:p>
+              <a:pPr defTabSz="685800"/>
+              <a:endParaRPr lang="en-CA" sz="1800" dirty="0">
+                <a:latin typeface="Calibri"/>
+              </a:endParaRPr>
+            </a:p>
+          </p:txBody>
+        </p:sp>
+        <p:sp>
+          <p:nvSpPr>
+            <p:cNvPr id="175" name="TextBox 174">
+              <a:extLst>
+                <a:ext uri="{FF2B5EF4-FFF2-40B4-BE49-F238E27FC236}">
+                  <a16:creationId xmlns:a16="http://schemas.microsoft.com/office/drawing/2014/main" id="{E7FE47F9-1AE3-63DE-B642-A97367A590AB}"/>
+                </a:ext>
+              </a:extLst>
+            </p:cNvPr>
+            <p:cNvSpPr txBox="1"/>
+            <p:nvPr/>
+          </p:nvSpPr>
+          <p:spPr>
+            <a:xfrm>
+              <a:off x="4092620" y="2448991"/>
+              <a:ext cx="906392" cy="492442"/>
+            </a:xfrm>
+            <a:prstGeom prst="rect">
+              <a:avLst/>
+            </a:prstGeom>
+            <a:noFill/>
+          </p:spPr>
+          <p:txBody>
+            <a:bodyPr wrap="square" rtlCol="0">
+              <a:spAutoFit/>
+            </a:bodyPr>
+            <a:lstStyle/>
+            <a:p>
+              <a:r>
+                <a:rPr lang="en-CA" sz="1800" b="1" dirty="0">
+                  <a:latin typeface="Calibri"/>
+                </a:rPr>
+                <a:t>a1  </a:t>
+              </a:r>
+              <a:r>
+                <a:rPr lang="en-CA" sz="1800" b="1" dirty="0">
+                  <a:solidFill>
+                    <a:srgbClr val="00B050"/>
+                  </a:solidFill>
+                  <a:latin typeface="Calibri"/>
+                </a:rPr>
+                <a:t>r</a:t>
+              </a:r>
+              <a:r>
+                <a:rPr lang="en-CA" sz="1800" b="1" baseline="-25000" dirty="0">
+                  <a:solidFill>
+                    <a:srgbClr val="00B050"/>
+                  </a:solidFill>
+                  <a:latin typeface="Calibri"/>
+                </a:rPr>
+                <a:t>2</a:t>
+              </a:r>
+              <a:endParaRPr lang="en-CA" sz="1800" b="1" dirty="0">
+                <a:solidFill>
+                  <a:srgbClr val="00B050"/>
+                </a:solidFill>
+                <a:latin typeface="Calibri"/>
+              </a:endParaRPr>
+            </a:p>
+          </p:txBody>
+        </p:sp>
+      </p:grpSp>
+      <p:cxnSp>
+        <p:nvCxnSpPr>
+          <p:cNvPr id="176" name="Straight Connector 175">
+            <a:extLst>
+              <a:ext uri="{FF2B5EF4-FFF2-40B4-BE49-F238E27FC236}">
+                <a16:creationId xmlns:a16="http://schemas.microsoft.com/office/drawing/2014/main" id="{FDFDA77D-3A51-968A-66A8-B8DBFEFF4595}"/>
+              </a:ext>
+            </a:extLst>
+          </p:cNvPr>
+          <p:cNvCxnSpPr>
+            <a:stCxn id="174" idx="2"/>
+          </p:cNvCxnSpPr>
+          <p:nvPr/>
+        </p:nvCxnSpPr>
+        <p:spPr bwMode="auto">
+          <a:xfrm flipH="1">
+            <a:off x="6559442" y="1291806"/>
+            <a:ext cx="576360" cy="266754"/>
+          </a:xfrm>
+          <a:prstGeom prst="line">
+            <a:avLst/>
+          </a:prstGeom>
+          <a:solidFill>
+            <a:schemeClr val="accent1"/>
+          </a:solidFill>
+          <a:ln w="9525" cap="flat" cmpd="sng" algn="ctr">
+            <a:solidFill>
+              <a:schemeClr val="tx1"/>
+            </a:solidFill>
+            <a:prstDash val="solid"/>
+            <a:round/>
+            <a:headEnd type="none" w="med" len="med"/>
+            <a:tailEnd type="none" w="med" len="med"/>
+          </a:ln>
+          <a:effectLst/>
+        </p:spPr>
+      </p:cxnSp>
+      <p:cxnSp>
+        <p:nvCxnSpPr>
+          <p:cNvPr id="177" name="Straight Connector 176">
+            <a:extLst>
+              <a:ext uri="{FF2B5EF4-FFF2-40B4-BE49-F238E27FC236}">
+                <a16:creationId xmlns:a16="http://schemas.microsoft.com/office/drawing/2014/main" id="{CB859E6C-4E4A-079C-A121-0FF33AF9271B}"/>
+              </a:ext>
+            </a:extLst>
+          </p:cNvPr>
+          <p:cNvCxnSpPr>
+            <a:stCxn id="174" idx="5"/>
+          </p:cNvCxnSpPr>
+          <p:nvPr/>
+        </p:nvCxnSpPr>
+        <p:spPr bwMode="auto">
+          <a:xfrm>
+            <a:off x="7261521" y="1349088"/>
+            <a:ext cx="557990" cy="911550"/>
+          </a:xfrm>
+          <a:prstGeom prst="line">
+            <a:avLst/>
+          </a:prstGeom>
+          <a:solidFill>
+            <a:schemeClr val="accent1"/>
+          </a:solidFill>
+          <a:ln w="9525" cap="flat" cmpd="sng" algn="ctr">
+            <a:solidFill>
+              <a:schemeClr val="tx1"/>
+            </a:solidFill>
+            <a:prstDash val="solid"/>
+            <a:round/>
+            <a:headEnd type="none" w="med" len="med"/>
+            <a:tailEnd type="none" w="med" len="med"/>
+          </a:ln>
+          <a:effectLst/>
+        </p:spPr>
+      </p:cxnSp>
+      <p:sp>
+        <p:nvSpPr>
+          <p:cNvPr id="178" name="TextBox 177">
+            <a:extLst>
+              <a:ext uri="{FF2B5EF4-FFF2-40B4-BE49-F238E27FC236}">
+                <a16:creationId xmlns:a16="http://schemas.microsoft.com/office/drawing/2014/main" id="{3225EA36-4932-3550-A996-1AF513251857}"/>
+              </a:ext>
+            </a:extLst>
+          </p:cNvPr>
+          <p:cNvSpPr txBox="1"/>
+          <p:nvPr/>
+        </p:nvSpPr>
+        <p:spPr>
+          <a:xfrm>
+            <a:off x="7605333" y="635981"/>
+            <a:ext cx="679794" cy="369332"/>
+          </a:xfrm>
+          <a:prstGeom prst="rect">
+            <a:avLst/>
+          </a:prstGeom>
+          <a:noFill/>
+        </p:spPr>
+        <p:txBody>
+          <a:bodyPr wrap="square" rtlCol="0">
+            <a:spAutoFit/>
+          </a:bodyPr>
+          <a:lstStyle/>
+          <a:p>
+            <a:r>
+              <a:rPr lang="en-CA" sz="1800" b="1" dirty="0">
+                <a:latin typeface="Calibri"/>
+              </a:rPr>
+              <a:t>or  </a:t>
+            </a:r>
+            <a:r>
+              <a:rPr lang="en-CA" sz="1800" b="1" dirty="0">
+                <a:solidFill>
+                  <a:srgbClr val="00B050"/>
+                </a:solidFill>
+                <a:latin typeface="Calibri"/>
+              </a:rPr>
+              <a:t>r</a:t>
+            </a:r>
+            <a:r>
+              <a:rPr lang="en-CA" sz="1800" b="1" baseline="-25000" dirty="0">
+                <a:solidFill>
+                  <a:srgbClr val="00B050"/>
+                </a:solidFill>
+                <a:latin typeface="Calibri"/>
+              </a:rPr>
+              <a:t>3</a:t>
+            </a:r>
+            <a:endParaRPr lang="en-CA" sz="1800" b="1" dirty="0">
+              <a:solidFill>
+                <a:srgbClr val="00B050"/>
+              </a:solidFill>
+              <a:latin typeface="Calibri"/>
+            </a:endParaRPr>
+          </a:p>
+        </p:txBody>
+      </p:sp>
+    </p:spTree>
+    <p:extLst>
+      <p:ext uri="{BB962C8B-B14F-4D97-AF65-F5344CB8AC3E}">
+        <p14:creationId xmlns:p14="http://schemas.microsoft.com/office/powerpoint/2010/main" val="1607953573"/>
+      </p:ext>
+    </p:extLst>
+  </p:cSld>
+  <p:clrMapOvr>
+    <a:masterClrMapping/>
+  </p:clrMapOvr>
+  <p:timing>
+    <p:tnLst>
+      <p:par>
+        <p:cTn id="1" dur="indefinite" restart="never" nodeType="tmRoot">
+          <p:childTnLst>
+            <p:seq concurrent="1" nextAc="seek">
+              <p:cTn id="2" dur="indefinite" nodeType="mainSeq">
+                <p:childTnLst>
+                  <p:par>
+                    <p:cTn id="3" fill="hold">
+                      <p:stCondLst>
+                        <p:cond delay="indefinite"/>
+                      </p:stCondLst>
+                      <p:childTnLst>
+                        <p:par>
+                          <p:cTn id="4" fill="hold">
+                            <p:stCondLst>
+                              <p:cond delay="0"/>
+                            </p:stCondLst>
+                            <p:childTnLst>
+                              <p:par>
+                                <p:cTn id="5" presetID="1" presetClass="entr" presetSubtype="0" fill="hold" grpId="0" nodeType="clickEffect">
+                                  <p:stCondLst>
+                                    <p:cond delay="0"/>
+                                  </p:stCondLst>
+                                  <p:childTnLst>
+                                    <p:set>
+                                      <p:cBhvr>
+                                        <p:cTn id="6" dur="1" fill="hold">
+                                          <p:stCondLst>
+                                            <p:cond delay="0"/>
+                                          </p:stCondLst>
+                                        </p:cTn>
+                                        <p:tgtEl>
+                                          <p:spTgt spid="178"/>
+                                        </p:tgtEl>
+                                        <p:attrNameLst>
+                                          <p:attrName>style.visibility</p:attrName>
+                                        </p:attrNameLst>
+                                      </p:cBhvr>
+                                      <p:to>
+                                        <p:strVal val="visible"/>
+                                      </p:to>
+                                    </p:set>
+                                  </p:childTnLst>
+                                </p:cTn>
+                              </p:par>
+                            </p:childTnLst>
+                          </p:cTn>
+                        </p:par>
+                      </p:childTnLst>
+                    </p:cTn>
+                  </p:par>
+                </p:childTnLst>
+              </p:cTn>
+              <p:prevCondLst>
+                <p:cond evt="onPrev" delay="0">
+                  <p:tgtEl>
+                    <p:sldTgt/>
+                  </p:tgtEl>
+                </p:cond>
+              </p:prevCondLst>
+              <p:nextCondLst>
+                <p:cond evt="onNext" delay="0">
+                  <p:tgtEl>
+                    <p:sldTgt/>
+                  </p:tgtEl>
+                </p:cond>
+              </p:nextCondLst>
+            </p:seq>
+          </p:childTnLst>
+        </p:cTn>
+      </p:par>
+    </p:tnLst>
+    <p:bldLst>
+      <p:bldP spid="178" grpId="0"/>
+    </p:bldLst>
+  </p:timing>
 </p:sld>
 </file>
 
